--- a/imagenes/fotos_conferencistas/fotos_conferencistas.pptx
+++ b/imagenes/fotos_conferencistas/fotos_conferencistas.pptx
@@ -14,7 +14,7 @@
     <p:sldId id="265" r:id="rId8"/>
     <p:sldId id="266" r:id="rId9"/>
     <p:sldId id="268" r:id="rId10"/>
-    <p:sldId id="267" r:id="rId11"/>
+    <p:sldId id="269" r:id="rId11"/>
   </p:sldIdLst>
   <p:sldSz cx="9144000" cy="6858000" type="screen4x3"/>
   <p:notesSz cx="6858000" cy="9144000"/>
@@ -311,7 +311,7 @@
           <a:p>
             <a:fld id="{A024B3BE-3465-4E30-B4C9-D82950137A0E}" type="datetimeFigureOut">
               <a:rPr lang="pt-BR" smtClean="0"/>
-              <a:t>23/05/2025</a:t>
+              <a:t>16/06/2025</a:t>
             </a:fld>
             <a:endParaRPr lang="pt-BR"/>
           </a:p>
@@ -353,7 +353,7 @@
           <a:p>
             <a:fld id="{E04F2195-75BF-44EC-BF37-2B2A1FBED77A}" type="slidenum">
               <a:rPr lang="pt-BR" smtClean="0"/>
-              <a:t>‹Nº›</a:t>
+              <a:t>‹#›</a:t>
             </a:fld>
             <a:endParaRPr lang="pt-BR"/>
           </a:p>
@@ -479,7 +479,7 @@
           <a:p>
             <a:fld id="{A024B3BE-3465-4E30-B4C9-D82950137A0E}" type="datetimeFigureOut">
               <a:rPr lang="pt-BR" smtClean="0"/>
-              <a:t>23/05/2025</a:t>
+              <a:t>16/06/2025</a:t>
             </a:fld>
             <a:endParaRPr lang="pt-BR"/>
           </a:p>
@@ -521,7 +521,7 @@
           <a:p>
             <a:fld id="{E04F2195-75BF-44EC-BF37-2B2A1FBED77A}" type="slidenum">
               <a:rPr lang="pt-BR" smtClean="0"/>
-              <a:t>‹Nº›</a:t>
+              <a:t>‹#›</a:t>
             </a:fld>
             <a:endParaRPr lang="pt-BR"/>
           </a:p>
@@ -657,7 +657,7 @@
           <a:p>
             <a:fld id="{A024B3BE-3465-4E30-B4C9-D82950137A0E}" type="datetimeFigureOut">
               <a:rPr lang="pt-BR" smtClean="0"/>
-              <a:t>23/05/2025</a:t>
+              <a:t>16/06/2025</a:t>
             </a:fld>
             <a:endParaRPr lang="pt-BR"/>
           </a:p>
@@ -699,7 +699,7 @@
           <a:p>
             <a:fld id="{E04F2195-75BF-44EC-BF37-2B2A1FBED77A}" type="slidenum">
               <a:rPr lang="pt-BR" smtClean="0"/>
-              <a:t>‹Nº›</a:t>
+              <a:t>‹#›</a:t>
             </a:fld>
             <a:endParaRPr lang="pt-BR"/>
           </a:p>
@@ -825,7 +825,7 @@
           <a:p>
             <a:fld id="{A024B3BE-3465-4E30-B4C9-D82950137A0E}" type="datetimeFigureOut">
               <a:rPr lang="pt-BR" smtClean="0"/>
-              <a:t>23/05/2025</a:t>
+              <a:t>16/06/2025</a:t>
             </a:fld>
             <a:endParaRPr lang="pt-BR"/>
           </a:p>
@@ -867,7 +867,7 @@
           <a:p>
             <a:fld id="{E04F2195-75BF-44EC-BF37-2B2A1FBED77A}" type="slidenum">
               <a:rPr lang="pt-BR" smtClean="0"/>
-              <a:t>‹Nº›</a:t>
+              <a:t>‹#›</a:t>
             </a:fld>
             <a:endParaRPr lang="pt-BR"/>
           </a:p>
@@ -1070,7 +1070,7 @@
           <a:p>
             <a:fld id="{A024B3BE-3465-4E30-B4C9-D82950137A0E}" type="datetimeFigureOut">
               <a:rPr lang="pt-BR" smtClean="0"/>
-              <a:t>23/05/2025</a:t>
+              <a:t>16/06/2025</a:t>
             </a:fld>
             <a:endParaRPr lang="pt-BR"/>
           </a:p>
@@ -1112,7 +1112,7 @@
           <a:p>
             <a:fld id="{E04F2195-75BF-44EC-BF37-2B2A1FBED77A}" type="slidenum">
               <a:rPr lang="pt-BR" smtClean="0"/>
-              <a:t>‹Nº›</a:t>
+              <a:t>‹#›</a:t>
             </a:fld>
             <a:endParaRPr lang="pt-BR"/>
           </a:p>
@@ -1355,7 +1355,7 @@
           <a:p>
             <a:fld id="{A024B3BE-3465-4E30-B4C9-D82950137A0E}" type="datetimeFigureOut">
               <a:rPr lang="pt-BR" smtClean="0"/>
-              <a:t>23/05/2025</a:t>
+              <a:t>16/06/2025</a:t>
             </a:fld>
             <a:endParaRPr lang="pt-BR"/>
           </a:p>
@@ -1397,7 +1397,7 @@
           <a:p>
             <a:fld id="{E04F2195-75BF-44EC-BF37-2B2A1FBED77A}" type="slidenum">
               <a:rPr lang="pt-BR" smtClean="0"/>
-              <a:t>‹Nº›</a:t>
+              <a:t>‹#›</a:t>
             </a:fld>
             <a:endParaRPr lang="pt-BR"/>
           </a:p>
@@ -1774,7 +1774,7 @@
           <a:p>
             <a:fld id="{A024B3BE-3465-4E30-B4C9-D82950137A0E}" type="datetimeFigureOut">
               <a:rPr lang="pt-BR" smtClean="0"/>
-              <a:t>23/05/2025</a:t>
+              <a:t>16/06/2025</a:t>
             </a:fld>
             <a:endParaRPr lang="pt-BR"/>
           </a:p>
@@ -1816,7 +1816,7 @@
           <a:p>
             <a:fld id="{E04F2195-75BF-44EC-BF37-2B2A1FBED77A}" type="slidenum">
               <a:rPr lang="pt-BR" smtClean="0"/>
-              <a:t>‹Nº›</a:t>
+              <a:t>‹#›</a:t>
             </a:fld>
             <a:endParaRPr lang="pt-BR"/>
           </a:p>
@@ -1891,7 +1891,7 @@
           <a:p>
             <a:fld id="{A024B3BE-3465-4E30-B4C9-D82950137A0E}" type="datetimeFigureOut">
               <a:rPr lang="pt-BR" smtClean="0"/>
-              <a:t>23/05/2025</a:t>
+              <a:t>16/06/2025</a:t>
             </a:fld>
             <a:endParaRPr lang="pt-BR"/>
           </a:p>
@@ -1933,7 +1933,7 @@
           <a:p>
             <a:fld id="{E04F2195-75BF-44EC-BF37-2B2A1FBED77A}" type="slidenum">
               <a:rPr lang="pt-BR" smtClean="0"/>
-              <a:t>‹Nº›</a:t>
+              <a:t>‹#›</a:t>
             </a:fld>
             <a:endParaRPr lang="pt-BR"/>
           </a:p>
@@ -1986,7 +1986,7 @@
           <a:p>
             <a:fld id="{A024B3BE-3465-4E30-B4C9-D82950137A0E}" type="datetimeFigureOut">
               <a:rPr lang="pt-BR" smtClean="0"/>
-              <a:t>23/05/2025</a:t>
+              <a:t>16/06/2025</a:t>
             </a:fld>
             <a:endParaRPr lang="pt-BR"/>
           </a:p>
@@ -2028,7 +2028,7 @@
           <a:p>
             <a:fld id="{E04F2195-75BF-44EC-BF37-2B2A1FBED77A}" type="slidenum">
               <a:rPr lang="pt-BR" smtClean="0"/>
-              <a:t>‹Nº›</a:t>
+              <a:t>‹#›</a:t>
             </a:fld>
             <a:endParaRPr lang="pt-BR"/>
           </a:p>
@@ -2261,7 +2261,7 @@
           <a:p>
             <a:fld id="{A024B3BE-3465-4E30-B4C9-D82950137A0E}" type="datetimeFigureOut">
               <a:rPr lang="pt-BR" smtClean="0"/>
-              <a:t>23/05/2025</a:t>
+              <a:t>16/06/2025</a:t>
             </a:fld>
             <a:endParaRPr lang="pt-BR"/>
           </a:p>
@@ -2303,7 +2303,7 @@
           <a:p>
             <a:fld id="{E04F2195-75BF-44EC-BF37-2B2A1FBED77A}" type="slidenum">
               <a:rPr lang="pt-BR" smtClean="0"/>
-              <a:t>‹Nº›</a:t>
+              <a:t>‹#›</a:t>
             </a:fld>
             <a:endParaRPr lang="pt-BR"/>
           </a:p>
@@ -2513,7 +2513,7 @@
           <a:p>
             <a:fld id="{A024B3BE-3465-4E30-B4C9-D82950137A0E}" type="datetimeFigureOut">
               <a:rPr lang="pt-BR" smtClean="0"/>
-              <a:t>23/05/2025</a:t>
+              <a:t>16/06/2025</a:t>
             </a:fld>
             <a:endParaRPr lang="pt-BR"/>
           </a:p>
@@ -2555,7 +2555,7 @@
           <a:p>
             <a:fld id="{E04F2195-75BF-44EC-BF37-2B2A1FBED77A}" type="slidenum">
               <a:rPr lang="pt-BR" smtClean="0"/>
-              <a:t>‹Nº›</a:t>
+              <a:t>‹#›</a:t>
             </a:fld>
             <a:endParaRPr lang="pt-BR"/>
           </a:p>
@@ -2724,7 +2724,7 @@
           <a:p>
             <a:fld id="{A024B3BE-3465-4E30-B4C9-D82950137A0E}" type="datetimeFigureOut">
               <a:rPr lang="pt-BR" smtClean="0"/>
-              <a:t>23/05/2025</a:t>
+              <a:t>16/06/2025</a:t>
             </a:fld>
             <a:endParaRPr lang="pt-BR"/>
           </a:p>
@@ -2802,7 +2802,7 @@
           <a:p>
             <a:fld id="{E04F2195-75BF-44EC-BF37-2B2A1FBED77A}" type="slidenum">
               <a:rPr lang="pt-BR" smtClean="0"/>
-              <a:t>‹Nº›</a:t>
+              <a:t>‹#›</a:t>
             </a:fld>
             <a:endParaRPr lang="pt-BR"/>
           </a:p>
@@ -3155,7 +3155,7 @@
         <p:cNvPr id="1" name="">
           <a:extLst>
             <a:ext uri="{FF2B5EF4-FFF2-40B4-BE49-F238E27FC236}">
-              <a16:creationId xmlns:a16="http://schemas.microsoft.com/office/drawing/2014/main" id="{74F5E59B-771A-6F12-0E9D-2305736FBCF4}"/>
+              <a16:creationId xmlns:a16="http://schemas.microsoft.com/office/drawing/2014/main" id="{0B65E6B1-F044-CF07-F8CD-2C7DE3B8F0F3}"/>
             </a:ext>
           </a:extLst>
         </p:cNvPr>
@@ -3170,10 +3170,51 @@
           <a:chExt cx="0" cy="0"/>
         </a:xfrm>
       </p:grpSpPr>
+      <p:pic>
+        <p:nvPicPr>
+          <p:cNvPr id="3" name="Imagen 2">
+            <a:extLst>
+              <a:ext uri="{FF2B5EF4-FFF2-40B4-BE49-F238E27FC236}">
+                <a16:creationId xmlns:a16="http://schemas.microsoft.com/office/drawing/2014/main" id="{BE51EB15-11D6-B280-896D-34A127906FB7}"/>
+              </a:ext>
+            </a:extLst>
+          </p:cNvPr>
+          <p:cNvPicPr>
+            <a:picLocks noChangeAspect="1"/>
+          </p:cNvPicPr>
+          <p:nvPr/>
+        </p:nvPicPr>
+        <p:blipFill>
+          <a:blip r:embed="rId2">
+            <a:extLst>
+              <a:ext uri="{28A0092B-C50C-407E-A947-70E740481C1C}">
+                <a14:useLocalDpi xmlns:a14="http://schemas.microsoft.com/office/drawing/2010/main" val="0"/>
+              </a:ext>
+            </a:extLst>
+          </a:blip>
+          <a:srcRect l="1923" r="1923"/>
+          <a:stretch/>
+        </p:blipFill>
+        <p:spPr>
+          <a:xfrm>
+            <a:off x="107504" y="116632"/>
+            <a:ext cx="3600400" cy="3744416"/>
+          </a:xfrm>
+          <a:prstGeom prst="ellipse">
+            <a:avLst/>
+          </a:prstGeom>
+          <a:ln>
+            <a:noFill/>
+          </a:ln>
+          <a:effectLst>
+            <a:softEdge rad="112500"/>
+          </a:effectLst>
+        </p:spPr>
+      </p:pic>
     </p:spTree>
     <p:extLst>
       <p:ext uri="{BB962C8B-B14F-4D97-AF65-F5344CB8AC3E}">
-        <p14:creationId xmlns:p14="http://schemas.microsoft.com/office/powerpoint/2010/main" val="2716089060"/>
+        <p14:creationId xmlns:p14="http://schemas.microsoft.com/office/powerpoint/2010/main" val="1790767065"/>
       </p:ext>
     </p:extLst>
   </p:cSld>

--- a/imagenes/fotos_conferencistas/fotos_conferencistas.pptx
+++ b/imagenes/fotos_conferencistas/fotos_conferencistas.pptx
@@ -15,6 +15,7 @@
     <p:sldId id="266" r:id="rId9"/>
     <p:sldId id="268" r:id="rId10"/>
     <p:sldId id="269" r:id="rId11"/>
+    <p:sldId id="270" r:id="rId12"/>
   </p:sldIdLst>
   <p:sldSz cx="9144000" cy="6858000" type="screen4x3"/>
   <p:notesSz cx="6858000" cy="9144000"/>
@@ -311,7 +312,7 @@
           <a:p>
             <a:fld id="{A024B3BE-3465-4E30-B4C9-D82950137A0E}" type="datetimeFigureOut">
               <a:rPr lang="pt-BR" smtClean="0"/>
-              <a:t>16/06/2025</a:t>
+              <a:t>22/06/2025</a:t>
             </a:fld>
             <a:endParaRPr lang="pt-BR"/>
           </a:p>
@@ -353,7 +354,7 @@
           <a:p>
             <a:fld id="{E04F2195-75BF-44EC-BF37-2B2A1FBED77A}" type="slidenum">
               <a:rPr lang="pt-BR" smtClean="0"/>
-              <a:t>‹#›</a:t>
+              <a:t>‹Nº›</a:t>
             </a:fld>
             <a:endParaRPr lang="pt-BR"/>
           </a:p>
@@ -479,7 +480,7 @@
           <a:p>
             <a:fld id="{A024B3BE-3465-4E30-B4C9-D82950137A0E}" type="datetimeFigureOut">
               <a:rPr lang="pt-BR" smtClean="0"/>
-              <a:t>16/06/2025</a:t>
+              <a:t>22/06/2025</a:t>
             </a:fld>
             <a:endParaRPr lang="pt-BR"/>
           </a:p>
@@ -521,7 +522,7 @@
           <a:p>
             <a:fld id="{E04F2195-75BF-44EC-BF37-2B2A1FBED77A}" type="slidenum">
               <a:rPr lang="pt-BR" smtClean="0"/>
-              <a:t>‹#›</a:t>
+              <a:t>‹Nº›</a:t>
             </a:fld>
             <a:endParaRPr lang="pt-BR"/>
           </a:p>
@@ -657,7 +658,7 @@
           <a:p>
             <a:fld id="{A024B3BE-3465-4E30-B4C9-D82950137A0E}" type="datetimeFigureOut">
               <a:rPr lang="pt-BR" smtClean="0"/>
-              <a:t>16/06/2025</a:t>
+              <a:t>22/06/2025</a:t>
             </a:fld>
             <a:endParaRPr lang="pt-BR"/>
           </a:p>
@@ -699,7 +700,7 @@
           <a:p>
             <a:fld id="{E04F2195-75BF-44EC-BF37-2B2A1FBED77A}" type="slidenum">
               <a:rPr lang="pt-BR" smtClean="0"/>
-              <a:t>‹#›</a:t>
+              <a:t>‹Nº›</a:t>
             </a:fld>
             <a:endParaRPr lang="pt-BR"/>
           </a:p>
@@ -825,7 +826,7 @@
           <a:p>
             <a:fld id="{A024B3BE-3465-4E30-B4C9-D82950137A0E}" type="datetimeFigureOut">
               <a:rPr lang="pt-BR" smtClean="0"/>
-              <a:t>16/06/2025</a:t>
+              <a:t>22/06/2025</a:t>
             </a:fld>
             <a:endParaRPr lang="pt-BR"/>
           </a:p>
@@ -867,7 +868,7 @@
           <a:p>
             <a:fld id="{E04F2195-75BF-44EC-BF37-2B2A1FBED77A}" type="slidenum">
               <a:rPr lang="pt-BR" smtClean="0"/>
-              <a:t>‹#›</a:t>
+              <a:t>‹Nº›</a:t>
             </a:fld>
             <a:endParaRPr lang="pt-BR"/>
           </a:p>
@@ -1070,7 +1071,7 @@
           <a:p>
             <a:fld id="{A024B3BE-3465-4E30-B4C9-D82950137A0E}" type="datetimeFigureOut">
               <a:rPr lang="pt-BR" smtClean="0"/>
-              <a:t>16/06/2025</a:t>
+              <a:t>22/06/2025</a:t>
             </a:fld>
             <a:endParaRPr lang="pt-BR"/>
           </a:p>
@@ -1112,7 +1113,7 @@
           <a:p>
             <a:fld id="{E04F2195-75BF-44EC-BF37-2B2A1FBED77A}" type="slidenum">
               <a:rPr lang="pt-BR" smtClean="0"/>
-              <a:t>‹#›</a:t>
+              <a:t>‹Nº›</a:t>
             </a:fld>
             <a:endParaRPr lang="pt-BR"/>
           </a:p>
@@ -1355,7 +1356,7 @@
           <a:p>
             <a:fld id="{A024B3BE-3465-4E30-B4C9-D82950137A0E}" type="datetimeFigureOut">
               <a:rPr lang="pt-BR" smtClean="0"/>
-              <a:t>16/06/2025</a:t>
+              <a:t>22/06/2025</a:t>
             </a:fld>
             <a:endParaRPr lang="pt-BR"/>
           </a:p>
@@ -1397,7 +1398,7 @@
           <a:p>
             <a:fld id="{E04F2195-75BF-44EC-BF37-2B2A1FBED77A}" type="slidenum">
               <a:rPr lang="pt-BR" smtClean="0"/>
-              <a:t>‹#›</a:t>
+              <a:t>‹Nº›</a:t>
             </a:fld>
             <a:endParaRPr lang="pt-BR"/>
           </a:p>
@@ -1774,7 +1775,7 @@
           <a:p>
             <a:fld id="{A024B3BE-3465-4E30-B4C9-D82950137A0E}" type="datetimeFigureOut">
               <a:rPr lang="pt-BR" smtClean="0"/>
-              <a:t>16/06/2025</a:t>
+              <a:t>22/06/2025</a:t>
             </a:fld>
             <a:endParaRPr lang="pt-BR"/>
           </a:p>
@@ -1816,7 +1817,7 @@
           <a:p>
             <a:fld id="{E04F2195-75BF-44EC-BF37-2B2A1FBED77A}" type="slidenum">
               <a:rPr lang="pt-BR" smtClean="0"/>
-              <a:t>‹#›</a:t>
+              <a:t>‹Nº›</a:t>
             </a:fld>
             <a:endParaRPr lang="pt-BR"/>
           </a:p>
@@ -1891,7 +1892,7 @@
           <a:p>
             <a:fld id="{A024B3BE-3465-4E30-B4C9-D82950137A0E}" type="datetimeFigureOut">
               <a:rPr lang="pt-BR" smtClean="0"/>
-              <a:t>16/06/2025</a:t>
+              <a:t>22/06/2025</a:t>
             </a:fld>
             <a:endParaRPr lang="pt-BR"/>
           </a:p>
@@ -1933,7 +1934,7 @@
           <a:p>
             <a:fld id="{E04F2195-75BF-44EC-BF37-2B2A1FBED77A}" type="slidenum">
               <a:rPr lang="pt-BR" smtClean="0"/>
-              <a:t>‹#›</a:t>
+              <a:t>‹Nº›</a:t>
             </a:fld>
             <a:endParaRPr lang="pt-BR"/>
           </a:p>
@@ -1986,7 +1987,7 @@
           <a:p>
             <a:fld id="{A024B3BE-3465-4E30-B4C9-D82950137A0E}" type="datetimeFigureOut">
               <a:rPr lang="pt-BR" smtClean="0"/>
-              <a:t>16/06/2025</a:t>
+              <a:t>22/06/2025</a:t>
             </a:fld>
             <a:endParaRPr lang="pt-BR"/>
           </a:p>
@@ -2028,7 +2029,7 @@
           <a:p>
             <a:fld id="{E04F2195-75BF-44EC-BF37-2B2A1FBED77A}" type="slidenum">
               <a:rPr lang="pt-BR" smtClean="0"/>
-              <a:t>‹#›</a:t>
+              <a:t>‹Nº›</a:t>
             </a:fld>
             <a:endParaRPr lang="pt-BR"/>
           </a:p>
@@ -2261,7 +2262,7 @@
           <a:p>
             <a:fld id="{A024B3BE-3465-4E30-B4C9-D82950137A0E}" type="datetimeFigureOut">
               <a:rPr lang="pt-BR" smtClean="0"/>
-              <a:t>16/06/2025</a:t>
+              <a:t>22/06/2025</a:t>
             </a:fld>
             <a:endParaRPr lang="pt-BR"/>
           </a:p>
@@ -2303,7 +2304,7 @@
           <a:p>
             <a:fld id="{E04F2195-75BF-44EC-BF37-2B2A1FBED77A}" type="slidenum">
               <a:rPr lang="pt-BR" smtClean="0"/>
-              <a:t>‹#›</a:t>
+              <a:t>‹Nº›</a:t>
             </a:fld>
             <a:endParaRPr lang="pt-BR"/>
           </a:p>
@@ -2513,7 +2514,7 @@
           <a:p>
             <a:fld id="{A024B3BE-3465-4E30-B4C9-D82950137A0E}" type="datetimeFigureOut">
               <a:rPr lang="pt-BR" smtClean="0"/>
-              <a:t>16/06/2025</a:t>
+              <a:t>22/06/2025</a:t>
             </a:fld>
             <a:endParaRPr lang="pt-BR"/>
           </a:p>
@@ -2555,7 +2556,7 @@
           <a:p>
             <a:fld id="{E04F2195-75BF-44EC-BF37-2B2A1FBED77A}" type="slidenum">
               <a:rPr lang="pt-BR" smtClean="0"/>
-              <a:t>‹#›</a:t>
+              <a:t>‹Nº›</a:t>
             </a:fld>
             <a:endParaRPr lang="pt-BR"/>
           </a:p>
@@ -2724,7 +2725,7 @@
           <a:p>
             <a:fld id="{A024B3BE-3465-4E30-B4C9-D82950137A0E}" type="datetimeFigureOut">
               <a:rPr lang="pt-BR" smtClean="0"/>
-              <a:t>16/06/2025</a:t>
+              <a:t>22/06/2025</a:t>
             </a:fld>
             <a:endParaRPr lang="pt-BR"/>
           </a:p>
@@ -2802,7 +2803,7 @@
           <a:p>
             <a:fld id="{E04F2195-75BF-44EC-BF37-2B2A1FBED77A}" type="slidenum">
               <a:rPr lang="pt-BR" smtClean="0"/>
-              <a:t>‹#›</a:t>
+              <a:t>‹Nº›</a:t>
             </a:fld>
             <a:endParaRPr lang="pt-BR"/>
           </a:p>
@@ -3215,6 +3216,83 @@
     <p:extLst>
       <p:ext uri="{BB962C8B-B14F-4D97-AF65-F5344CB8AC3E}">
         <p14:creationId xmlns:p14="http://schemas.microsoft.com/office/powerpoint/2010/main" val="1790767065"/>
+      </p:ext>
+    </p:extLst>
+  </p:cSld>
+  <p:clrMapOvr>
+    <a:masterClrMapping/>
+  </p:clrMapOvr>
+</p:sld>
+</file>
+
+<file path=ppt/slides/slide11.xml><?xml version="1.0" encoding="utf-8"?>
+<p:sld xmlns:a="http://schemas.openxmlformats.org/drawingml/2006/main" xmlns:r="http://schemas.openxmlformats.org/officeDocument/2006/relationships" xmlns:p="http://schemas.openxmlformats.org/presentationml/2006/main">
+  <p:cSld>
+    <p:spTree>
+      <p:nvGrpSpPr>
+        <p:cNvPr id="1" name="">
+          <a:extLst>
+            <a:ext uri="{FF2B5EF4-FFF2-40B4-BE49-F238E27FC236}">
+              <a16:creationId xmlns:a16="http://schemas.microsoft.com/office/drawing/2014/main" id="{0B65E6B1-F044-CF07-F8CD-2C7DE3B8F0F3}"/>
+            </a:ext>
+          </a:extLst>
+        </p:cNvPr>
+        <p:cNvGrpSpPr/>
+        <p:nvPr/>
+      </p:nvGrpSpPr>
+      <p:grpSpPr>
+        <a:xfrm>
+          <a:off x="0" y="0"/>
+          <a:ext cx="0" cy="0"/>
+          <a:chOff x="0" y="0"/>
+          <a:chExt cx="0" cy="0"/>
+        </a:xfrm>
+      </p:grpSpPr>
+      <p:pic>
+        <p:nvPicPr>
+          <p:cNvPr id="3" name="Imagen 2">
+            <a:extLst>
+              <a:ext uri="{FF2B5EF4-FFF2-40B4-BE49-F238E27FC236}">
+                <a16:creationId xmlns:a16="http://schemas.microsoft.com/office/drawing/2014/main" id="{BE51EB15-11D6-B280-896D-34A127906FB7}"/>
+              </a:ext>
+            </a:extLst>
+          </p:cNvPr>
+          <p:cNvPicPr>
+            <a:picLocks noChangeAspect="1"/>
+          </p:cNvPicPr>
+          <p:nvPr/>
+        </p:nvPicPr>
+        <p:blipFill>
+          <a:blip r:embed="rId2">
+            <a:extLst>
+              <a:ext uri="{28A0092B-C50C-407E-A947-70E740481C1C}">
+                <a14:useLocalDpi xmlns:a14="http://schemas.microsoft.com/office/drawing/2010/main" val="0"/>
+              </a:ext>
+            </a:extLst>
+          </a:blip>
+          <a:srcRect l="1923" r="1923"/>
+          <a:stretch/>
+        </p:blipFill>
+        <p:spPr>
+          <a:xfrm>
+            <a:off x="107504" y="116632"/>
+            <a:ext cx="3600400" cy="3744416"/>
+          </a:xfrm>
+          <a:prstGeom prst="ellipse">
+            <a:avLst/>
+          </a:prstGeom>
+          <a:ln>
+            <a:noFill/>
+          </a:ln>
+          <a:effectLst>
+            <a:softEdge rad="112500"/>
+          </a:effectLst>
+        </p:spPr>
+      </p:pic>
+    </p:spTree>
+    <p:extLst>
+      <p:ext uri="{BB962C8B-B14F-4D97-AF65-F5344CB8AC3E}">
+        <p14:creationId xmlns:p14="http://schemas.microsoft.com/office/powerpoint/2010/main" val="3404911748"/>
       </p:ext>
     </p:extLst>
   </p:cSld>

--- a/imagenes/fotos_conferencistas/fotos_conferencistas.pptx
+++ b/imagenes/fotos_conferencistas/fotos_conferencistas.pptx
@@ -16,6 +16,7 @@
     <p:sldId id="268" r:id="rId10"/>
     <p:sldId id="269" r:id="rId11"/>
     <p:sldId id="270" r:id="rId12"/>
+    <p:sldId id="271" r:id="rId13"/>
   </p:sldIdLst>
   <p:sldSz cx="9144000" cy="6858000" type="screen4x3"/>
   <p:notesSz cx="6858000" cy="9144000"/>
@@ -312,7 +313,7 @@
           <a:p>
             <a:fld id="{A024B3BE-3465-4E30-B4C9-D82950137A0E}" type="datetimeFigureOut">
               <a:rPr lang="pt-BR" smtClean="0"/>
-              <a:t>22/06/2025</a:t>
+              <a:t>24/06/2025</a:t>
             </a:fld>
             <a:endParaRPr lang="pt-BR"/>
           </a:p>
@@ -480,7 +481,7 @@
           <a:p>
             <a:fld id="{A024B3BE-3465-4E30-B4C9-D82950137A0E}" type="datetimeFigureOut">
               <a:rPr lang="pt-BR" smtClean="0"/>
-              <a:t>22/06/2025</a:t>
+              <a:t>24/06/2025</a:t>
             </a:fld>
             <a:endParaRPr lang="pt-BR"/>
           </a:p>
@@ -658,7 +659,7 @@
           <a:p>
             <a:fld id="{A024B3BE-3465-4E30-B4C9-D82950137A0E}" type="datetimeFigureOut">
               <a:rPr lang="pt-BR" smtClean="0"/>
-              <a:t>22/06/2025</a:t>
+              <a:t>24/06/2025</a:t>
             </a:fld>
             <a:endParaRPr lang="pt-BR"/>
           </a:p>
@@ -826,7 +827,7 @@
           <a:p>
             <a:fld id="{A024B3BE-3465-4E30-B4C9-D82950137A0E}" type="datetimeFigureOut">
               <a:rPr lang="pt-BR" smtClean="0"/>
-              <a:t>22/06/2025</a:t>
+              <a:t>24/06/2025</a:t>
             </a:fld>
             <a:endParaRPr lang="pt-BR"/>
           </a:p>
@@ -1071,7 +1072,7 @@
           <a:p>
             <a:fld id="{A024B3BE-3465-4E30-B4C9-D82950137A0E}" type="datetimeFigureOut">
               <a:rPr lang="pt-BR" smtClean="0"/>
-              <a:t>22/06/2025</a:t>
+              <a:t>24/06/2025</a:t>
             </a:fld>
             <a:endParaRPr lang="pt-BR"/>
           </a:p>
@@ -1356,7 +1357,7 @@
           <a:p>
             <a:fld id="{A024B3BE-3465-4E30-B4C9-D82950137A0E}" type="datetimeFigureOut">
               <a:rPr lang="pt-BR" smtClean="0"/>
-              <a:t>22/06/2025</a:t>
+              <a:t>24/06/2025</a:t>
             </a:fld>
             <a:endParaRPr lang="pt-BR"/>
           </a:p>
@@ -1775,7 +1776,7 @@
           <a:p>
             <a:fld id="{A024B3BE-3465-4E30-B4C9-D82950137A0E}" type="datetimeFigureOut">
               <a:rPr lang="pt-BR" smtClean="0"/>
-              <a:t>22/06/2025</a:t>
+              <a:t>24/06/2025</a:t>
             </a:fld>
             <a:endParaRPr lang="pt-BR"/>
           </a:p>
@@ -1892,7 +1893,7 @@
           <a:p>
             <a:fld id="{A024B3BE-3465-4E30-B4C9-D82950137A0E}" type="datetimeFigureOut">
               <a:rPr lang="pt-BR" smtClean="0"/>
-              <a:t>22/06/2025</a:t>
+              <a:t>24/06/2025</a:t>
             </a:fld>
             <a:endParaRPr lang="pt-BR"/>
           </a:p>
@@ -1987,7 +1988,7 @@
           <a:p>
             <a:fld id="{A024B3BE-3465-4E30-B4C9-D82950137A0E}" type="datetimeFigureOut">
               <a:rPr lang="pt-BR" smtClean="0"/>
-              <a:t>22/06/2025</a:t>
+              <a:t>24/06/2025</a:t>
             </a:fld>
             <a:endParaRPr lang="pt-BR"/>
           </a:p>
@@ -2262,7 +2263,7 @@
           <a:p>
             <a:fld id="{A024B3BE-3465-4E30-B4C9-D82950137A0E}" type="datetimeFigureOut">
               <a:rPr lang="pt-BR" smtClean="0"/>
-              <a:t>22/06/2025</a:t>
+              <a:t>24/06/2025</a:t>
             </a:fld>
             <a:endParaRPr lang="pt-BR"/>
           </a:p>
@@ -2514,7 +2515,7 @@
           <a:p>
             <a:fld id="{A024B3BE-3465-4E30-B4C9-D82950137A0E}" type="datetimeFigureOut">
               <a:rPr lang="pt-BR" smtClean="0"/>
-              <a:t>22/06/2025</a:t>
+              <a:t>24/06/2025</a:t>
             </a:fld>
             <a:endParaRPr lang="pt-BR"/>
           </a:p>
@@ -2725,7 +2726,7 @@
           <a:p>
             <a:fld id="{A024B3BE-3465-4E30-B4C9-D82950137A0E}" type="datetimeFigureOut">
               <a:rPr lang="pt-BR" smtClean="0"/>
-              <a:t>22/06/2025</a:t>
+              <a:t>24/06/2025</a:t>
             </a:fld>
             <a:endParaRPr lang="pt-BR"/>
           </a:p>
@@ -3293,6 +3294,83 @@
     <p:extLst>
       <p:ext uri="{BB962C8B-B14F-4D97-AF65-F5344CB8AC3E}">
         <p14:creationId xmlns:p14="http://schemas.microsoft.com/office/powerpoint/2010/main" val="3404911748"/>
+      </p:ext>
+    </p:extLst>
+  </p:cSld>
+  <p:clrMapOvr>
+    <a:masterClrMapping/>
+  </p:clrMapOvr>
+</p:sld>
+</file>
+
+<file path=ppt/slides/slide12.xml><?xml version="1.0" encoding="utf-8"?>
+<p:sld xmlns:a="http://schemas.openxmlformats.org/drawingml/2006/main" xmlns:r="http://schemas.openxmlformats.org/officeDocument/2006/relationships" xmlns:p="http://schemas.openxmlformats.org/presentationml/2006/main">
+  <p:cSld>
+    <p:spTree>
+      <p:nvGrpSpPr>
+        <p:cNvPr id="1" name="">
+          <a:extLst>
+            <a:ext uri="{FF2B5EF4-FFF2-40B4-BE49-F238E27FC236}">
+              <a16:creationId xmlns:a16="http://schemas.microsoft.com/office/drawing/2014/main" id="{0B65E6B1-F044-CF07-F8CD-2C7DE3B8F0F3}"/>
+            </a:ext>
+          </a:extLst>
+        </p:cNvPr>
+        <p:cNvGrpSpPr/>
+        <p:nvPr/>
+      </p:nvGrpSpPr>
+      <p:grpSpPr>
+        <a:xfrm>
+          <a:off x="0" y="0"/>
+          <a:ext cx="0" cy="0"/>
+          <a:chOff x="0" y="0"/>
+          <a:chExt cx="0" cy="0"/>
+        </a:xfrm>
+      </p:grpSpPr>
+      <p:pic>
+        <p:nvPicPr>
+          <p:cNvPr id="3" name="Imagen 2">
+            <a:extLst>
+              <a:ext uri="{FF2B5EF4-FFF2-40B4-BE49-F238E27FC236}">
+                <a16:creationId xmlns:a16="http://schemas.microsoft.com/office/drawing/2014/main" id="{BE51EB15-11D6-B280-896D-34A127906FB7}"/>
+              </a:ext>
+            </a:extLst>
+          </p:cNvPr>
+          <p:cNvPicPr>
+            <a:picLocks noChangeAspect="1"/>
+          </p:cNvPicPr>
+          <p:nvPr/>
+        </p:nvPicPr>
+        <p:blipFill>
+          <a:blip r:embed="rId2">
+            <a:extLst>
+              <a:ext uri="{28A0092B-C50C-407E-A947-70E740481C1C}">
+                <a14:useLocalDpi xmlns:a14="http://schemas.microsoft.com/office/drawing/2010/main" val="0"/>
+              </a:ext>
+            </a:extLst>
+          </a:blip>
+          <a:srcRect t="2657" b="2657"/>
+          <a:stretch/>
+        </p:blipFill>
+        <p:spPr>
+          <a:xfrm>
+            <a:off x="22880" y="116632"/>
+            <a:ext cx="3600400" cy="3744416"/>
+          </a:xfrm>
+          <a:prstGeom prst="ellipse">
+            <a:avLst/>
+          </a:prstGeom>
+          <a:ln>
+            <a:noFill/>
+          </a:ln>
+          <a:effectLst>
+            <a:softEdge rad="112500"/>
+          </a:effectLst>
+        </p:spPr>
+      </p:pic>
+    </p:spTree>
+    <p:extLst>
+      <p:ext uri="{BB962C8B-B14F-4D97-AF65-F5344CB8AC3E}">
+        <p14:creationId xmlns:p14="http://schemas.microsoft.com/office/powerpoint/2010/main" val="3895392807"/>
       </p:ext>
     </p:extLst>
   </p:cSld>

--- a/imagenes/fotos_conferencistas/fotos_conferencistas.pptx
+++ b/imagenes/fotos_conferencistas/fotos_conferencistas.pptx
@@ -17,6 +17,7 @@
     <p:sldId id="269" r:id="rId11"/>
     <p:sldId id="270" r:id="rId12"/>
     <p:sldId id="271" r:id="rId13"/>
+    <p:sldId id="272" r:id="rId14"/>
   </p:sldIdLst>
   <p:sldSz cx="9144000" cy="6858000" type="screen4x3"/>
   <p:notesSz cx="6858000" cy="9144000"/>
@@ -313,7 +314,7 @@
           <a:p>
             <a:fld id="{A024B3BE-3465-4E30-B4C9-D82950137A0E}" type="datetimeFigureOut">
               <a:rPr lang="pt-BR" smtClean="0"/>
-              <a:t>24/06/2025</a:t>
+              <a:t>20/08/2025</a:t>
             </a:fld>
             <a:endParaRPr lang="pt-BR"/>
           </a:p>
@@ -355,7 +356,7 @@
           <a:p>
             <a:fld id="{E04F2195-75BF-44EC-BF37-2B2A1FBED77A}" type="slidenum">
               <a:rPr lang="pt-BR" smtClean="0"/>
-              <a:t>‹Nº›</a:t>
+              <a:t>‹#›</a:t>
             </a:fld>
             <a:endParaRPr lang="pt-BR"/>
           </a:p>
@@ -481,7 +482,7 @@
           <a:p>
             <a:fld id="{A024B3BE-3465-4E30-B4C9-D82950137A0E}" type="datetimeFigureOut">
               <a:rPr lang="pt-BR" smtClean="0"/>
-              <a:t>24/06/2025</a:t>
+              <a:t>20/08/2025</a:t>
             </a:fld>
             <a:endParaRPr lang="pt-BR"/>
           </a:p>
@@ -523,7 +524,7 @@
           <a:p>
             <a:fld id="{E04F2195-75BF-44EC-BF37-2B2A1FBED77A}" type="slidenum">
               <a:rPr lang="pt-BR" smtClean="0"/>
-              <a:t>‹Nº›</a:t>
+              <a:t>‹#›</a:t>
             </a:fld>
             <a:endParaRPr lang="pt-BR"/>
           </a:p>
@@ -659,7 +660,7 @@
           <a:p>
             <a:fld id="{A024B3BE-3465-4E30-B4C9-D82950137A0E}" type="datetimeFigureOut">
               <a:rPr lang="pt-BR" smtClean="0"/>
-              <a:t>24/06/2025</a:t>
+              <a:t>20/08/2025</a:t>
             </a:fld>
             <a:endParaRPr lang="pt-BR"/>
           </a:p>
@@ -701,7 +702,7 @@
           <a:p>
             <a:fld id="{E04F2195-75BF-44EC-BF37-2B2A1FBED77A}" type="slidenum">
               <a:rPr lang="pt-BR" smtClean="0"/>
-              <a:t>‹Nº›</a:t>
+              <a:t>‹#›</a:t>
             </a:fld>
             <a:endParaRPr lang="pt-BR"/>
           </a:p>
@@ -827,7 +828,7 @@
           <a:p>
             <a:fld id="{A024B3BE-3465-4E30-B4C9-D82950137A0E}" type="datetimeFigureOut">
               <a:rPr lang="pt-BR" smtClean="0"/>
-              <a:t>24/06/2025</a:t>
+              <a:t>20/08/2025</a:t>
             </a:fld>
             <a:endParaRPr lang="pt-BR"/>
           </a:p>
@@ -869,7 +870,7 @@
           <a:p>
             <a:fld id="{E04F2195-75BF-44EC-BF37-2B2A1FBED77A}" type="slidenum">
               <a:rPr lang="pt-BR" smtClean="0"/>
-              <a:t>‹Nº›</a:t>
+              <a:t>‹#›</a:t>
             </a:fld>
             <a:endParaRPr lang="pt-BR"/>
           </a:p>
@@ -1072,7 +1073,7 @@
           <a:p>
             <a:fld id="{A024B3BE-3465-4E30-B4C9-D82950137A0E}" type="datetimeFigureOut">
               <a:rPr lang="pt-BR" smtClean="0"/>
-              <a:t>24/06/2025</a:t>
+              <a:t>20/08/2025</a:t>
             </a:fld>
             <a:endParaRPr lang="pt-BR"/>
           </a:p>
@@ -1114,7 +1115,7 @@
           <a:p>
             <a:fld id="{E04F2195-75BF-44EC-BF37-2B2A1FBED77A}" type="slidenum">
               <a:rPr lang="pt-BR" smtClean="0"/>
-              <a:t>‹Nº›</a:t>
+              <a:t>‹#›</a:t>
             </a:fld>
             <a:endParaRPr lang="pt-BR"/>
           </a:p>
@@ -1357,7 +1358,7 @@
           <a:p>
             <a:fld id="{A024B3BE-3465-4E30-B4C9-D82950137A0E}" type="datetimeFigureOut">
               <a:rPr lang="pt-BR" smtClean="0"/>
-              <a:t>24/06/2025</a:t>
+              <a:t>20/08/2025</a:t>
             </a:fld>
             <a:endParaRPr lang="pt-BR"/>
           </a:p>
@@ -1399,7 +1400,7 @@
           <a:p>
             <a:fld id="{E04F2195-75BF-44EC-BF37-2B2A1FBED77A}" type="slidenum">
               <a:rPr lang="pt-BR" smtClean="0"/>
-              <a:t>‹Nº›</a:t>
+              <a:t>‹#›</a:t>
             </a:fld>
             <a:endParaRPr lang="pt-BR"/>
           </a:p>
@@ -1776,7 +1777,7 @@
           <a:p>
             <a:fld id="{A024B3BE-3465-4E30-B4C9-D82950137A0E}" type="datetimeFigureOut">
               <a:rPr lang="pt-BR" smtClean="0"/>
-              <a:t>24/06/2025</a:t>
+              <a:t>20/08/2025</a:t>
             </a:fld>
             <a:endParaRPr lang="pt-BR"/>
           </a:p>
@@ -1818,7 +1819,7 @@
           <a:p>
             <a:fld id="{E04F2195-75BF-44EC-BF37-2B2A1FBED77A}" type="slidenum">
               <a:rPr lang="pt-BR" smtClean="0"/>
-              <a:t>‹Nº›</a:t>
+              <a:t>‹#›</a:t>
             </a:fld>
             <a:endParaRPr lang="pt-BR"/>
           </a:p>
@@ -1893,7 +1894,7 @@
           <a:p>
             <a:fld id="{A024B3BE-3465-4E30-B4C9-D82950137A0E}" type="datetimeFigureOut">
               <a:rPr lang="pt-BR" smtClean="0"/>
-              <a:t>24/06/2025</a:t>
+              <a:t>20/08/2025</a:t>
             </a:fld>
             <a:endParaRPr lang="pt-BR"/>
           </a:p>
@@ -1935,7 +1936,7 @@
           <a:p>
             <a:fld id="{E04F2195-75BF-44EC-BF37-2B2A1FBED77A}" type="slidenum">
               <a:rPr lang="pt-BR" smtClean="0"/>
-              <a:t>‹Nº›</a:t>
+              <a:t>‹#›</a:t>
             </a:fld>
             <a:endParaRPr lang="pt-BR"/>
           </a:p>
@@ -1988,7 +1989,7 @@
           <a:p>
             <a:fld id="{A024B3BE-3465-4E30-B4C9-D82950137A0E}" type="datetimeFigureOut">
               <a:rPr lang="pt-BR" smtClean="0"/>
-              <a:t>24/06/2025</a:t>
+              <a:t>20/08/2025</a:t>
             </a:fld>
             <a:endParaRPr lang="pt-BR"/>
           </a:p>
@@ -2030,7 +2031,7 @@
           <a:p>
             <a:fld id="{E04F2195-75BF-44EC-BF37-2B2A1FBED77A}" type="slidenum">
               <a:rPr lang="pt-BR" smtClean="0"/>
-              <a:t>‹Nº›</a:t>
+              <a:t>‹#›</a:t>
             </a:fld>
             <a:endParaRPr lang="pt-BR"/>
           </a:p>
@@ -2263,7 +2264,7 @@
           <a:p>
             <a:fld id="{A024B3BE-3465-4E30-B4C9-D82950137A0E}" type="datetimeFigureOut">
               <a:rPr lang="pt-BR" smtClean="0"/>
-              <a:t>24/06/2025</a:t>
+              <a:t>20/08/2025</a:t>
             </a:fld>
             <a:endParaRPr lang="pt-BR"/>
           </a:p>
@@ -2305,7 +2306,7 @@
           <a:p>
             <a:fld id="{E04F2195-75BF-44EC-BF37-2B2A1FBED77A}" type="slidenum">
               <a:rPr lang="pt-BR" smtClean="0"/>
-              <a:t>‹Nº›</a:t>
+              <a:t>‹#›</a:t>
             </a:fld>
             <a:endParaRPr lang="pt-BR"/>
           </a:p>
@@ -2515,7 +2516,7 @@
           <a:p>
             <a:fld id="{A024B3BE-3465-4E30-B4C9-D82950137A0E}" type="datetimeFigureOut">
               <a:rPr lang="pt-BR" smtClean="0"/>
-              <a:t>24/06/2025</a:t>
+              <a:t>20/08/2025</a:t>
             </a:fld>
             <a:endParaRPr lang="pt-BR"/>
           </a:p>
@@ -2557,7 +2558,7 @@
           <a:p>
             <a:fld id="{E04F2195-75BF-44EC-BF37-2B2A1FBED77A}" type="slidenum">
               <a:rPr lang="pt-BR" smtClean="0"/>
-              <a:t>‹Nº›</a:t>
+              <a:t>‹#›</a:t>
             </a:fld>
             <a:endParaRPr lang="pt-BR"/>
           </a:p>
@@ -2726,7 +2727,7 @@
           <a:p>
             <a:fld id="{A024B3BE-3465-4E30-B4C9-D82950137A0E}" type="datetimeFigureOut">
               <a:rPr lang="pt-BR" smtClean="0"/>
-              <a:t>24/06/2025</a:t>
+              <a:t>20/08/2025</a:t>
             </a:fld>
             <a:endParaRPr lang="pt-BR"/>
           </a:p>
@@ -2804,7 +2805,7 @@
           <a:p>
             <a:fld id="{E04F2195-75BF-44EC-BF37-2B2A1FBED77A}" type="slidenum">
               <a:rPr lang="pt-BR" smtClean="0"/>
-              <a:t>‹Nº›</a:t>
+              <a:t>‹#›</a:t>
             </a:fld>
             <a:endParaRPr lang="pt-BR"/>
           </a:p>
@@ -3371,6 +3372,218 @@
     <p:extLst>
       <p:ext uri="{BB962C8B-B14F-4D97-AF65-F5344CB8AC3E}">
         <p14:creationId xmlns:p14="http://schemas.microsoft.com/office/powerpoint/2010/main" val="3895392807"/>
+      </p:ext>
+    </p:extLst>
+  </p:cSld>
+  <p:clrMapOvr>
+    <a:masterClrMapping/>
+  </p:clrMapOvr>
+</p:sld>
+</file>
+
+<file path=ppt/slides/slide13.xml><?xml version="1.0" encoding="utf-8"?>
+<p:sld xmlns:a="http://schemas.openxmlformats.org/drawingml/2006/main" xmlns:r="http://schemas.openxmlformats.org/officeDocument/2006/relationships" xmlns:p="http://schemas.openxmlformats.org/presentationml/2006/main">
+  <p:cSld>
+    <p:spTree>
+      <p:nvGrpSpPr>
+        <p:cNvPr id="1" name=""/>
+        <p:cNvGrpSpPr/>
+        <p:nvPr/>
+      </p:nvGrpSpPr>
+      <p:grpSpPr>
+        <a:xfrm>
+          <a:off x="0" y="0"/>
+          <a:ext cx="0" cy="0"/>
+          <a:chOff x="0" y="0"/>
+          <a:chExt cx="0" cy="0"/>
+        </a:xfrm>
+      </p:grpSpPr>
+      <p:sp>
+        <p:nvSpPr>
+          <p:cNvPr id="4" name="Rectangle: Rounded Corners 3">
+            <a:extLst>
+              <a:ext uri="{FF2B5EF4-FFF2-40B4-BE49-F238E27FC236}">
+                <a16:creationId xmlns:a16="http://schemas.microsoft.com/office/drawing/2014/main" id="{E1518604-BEEE-A719-2455-A872E1ADA963}"/>
+              </a:ext>
+            </a:extLst>
+          </p:cNvPr>
+          <p:cNvSpPr/>
+          <p:nvPr/>
+        </p:nvSpPr>
+        <p:spPr>
+          <a:xfrm>
+            <a:off x="1403648" y="476672"/>
+            <a:ext cx="4151312" cy="1152128"/>
+          </a:xfrm>
+          <a:prstGeom prst="roundRect">
+            <a:avLst/>
+          </a:prstGeom>
+          <a:solidFill>
+            <a:schemeClr val="accent6">
+              <a:lumMod val="75000"/>
+            </a:schemeClr>
+          </a:solidFill>
+        </p:spPr>
+        <p:style>
+          <a:lnRef idx="2">
+            <a:schemeClr val="accent1">
+              <a:shade val="15000"/>
+            </a:schemeClr>
+          </a:lnRef>
+          <a:fillRef idx="1">
+            <a:schemeClr val="accent1"/>
+          </a:fillRef>
+          <a:effectRef idx="0">
+            <a:schemeClr val="accent1"/>
+          </a:effectRef>
+          <a:fontRef idx="minor">
+            <a:schemeClr val="lt1"/>
+          </a:fontRef>
+        </p:style>
+        <p:txBody>
+          <a:bodyPr rtlCol="0" anchor="ctr"/>
+          <a:lstStyle/>
+          <a:p>
+            <a:pPr algn="ctr"/>
+            <a:r>
+              <a:rPr lang="es-419" sz="4800" dirty="0"/>
+              <a:t>Inscríbete aquí</a:t>
+            </a:r>
+            <a:endParaRPr lang="es-ES" dirty="0"/>
+          </a:p>
+        </p:txBody>
+      </p:sp>
+      <p:pic>
+        <p:nvPicPr>
+          <p:cNvPr id="3" name="Graphic 2" descr="Cursor outline">
+            <a:extLst>
+              <a:ext uri="{FF2B5EF4-FFF2-40B4-BE49-F238E27FC236}">
+                <a16:creationId xmlns:a16="http://schemas.microsoft.com/office/drawing/2014/main" id="{EA547C34-E68B-B953-9B5C-833849E110C7}"/>
+              </a:ext>
+            </a:extLst>
+          </p:cNvPr>
+          <p:cNvPicPr>
+            <a:picLocks noChangeAspect="1"/>
+          </p:cNvPicPr>
+          <p:nvPr/>
+        </p:nvPicPr>
+        <p:blipFill>
+          <a:blip r:embed="rId2">
+            <a:extLst>
+              <a:ext uri="{96DAC541-7B7A-43D3-8B79-37D633B846F1}">
+                <asvg:svgBlip xmlns:asvg="http://schemas.microsoft.com/office/drawing/2016/SVG/main" r:embed="rId3"/>
+              </a:ext>
+            </a:extLst>
+          </a:blip>
+          <a:stretch>
+            <a:fillRect/>
+          </a:stretch>
+        </p:blipFill>
+        <p:spPr>
+          <a:xfrm flipH="1">
+            <a:off x="514400" y="908720"/>
+            <a:ext cx="961256" cy="961256"/>
+          </a:xfrm>
+          <a:prstGeom prst="rect">
+            <a:avLst/>
+          </a:prstGeom>
+        </p:spPr>
+      </p:pic>
+      <p:sp>
+        <p:nvSpPr>
+          <p:cNvPr id="5" name="Rectangle: Rounded Corners 4">
+            <a:extLst>
+              <a:ext uri="{FF2B5EF4-FFF2-40B4-BE49-F238E27FC236}">
+                <a16:creationId xmlns:a16="http://schemas.microsoft.com/office/drawing/2014/main" id="{D008031E-FAF4-B68D-4146-BB85D2E32174}"/>
+              </a:ext>
+            </a:extLst>
+          </p:cNvPr>
+          <p:cNvSpPr/>
+          <p:nvPr/>
+        </p:nvSpPr>
+        <p:spPr>
+          <a:xfrm>
+            <a:off x="1403648" y="2348880"/>
+            <a:ext cx="4151312" cy="1152128"/>
+          </a:xfrm>
+          <a:prstGeom prst="roundRect">
+            <a:avLst/>
+          </a:prstGeom>
+          <a:solidFill>
+            <a:schemeClr val="accent3">
+              <a:lumMod val="75000"/>
+            </a:schemeClr>
+          </a:solidFill>
+        </p:spPr>
+        <p:style>
+          <a:lnRef idx="2">
+            <a:schemeClr val="accent1">
+              <a:shade val="15000"/>
+            </a:schemeClr>
+          </a:lnRef>
+          <a:fillRef idx="1">
+            <a:schemeClr val="accent1"/>
+          </a:fillRef>
+          <a:effectRef idx="0">
+            <a:schemeClr val="accent1"/>
+          </a:effectRef>
+          <a:fontRef idx="minor">
+            <a:schemeClr val="lt1"/>
+          </a:fontRef>
+        </p:style>
+        <p:txBody>
+          <a:bodyPr rtlCol="0" anchor="ctr"/>
+          <a:lstStyle/>
+          <a:p>
+            <a:pPr algn="ctr"/>
+            <a:r>
+              <a:rPr lang="es-419" sz="4800" dirty="0"/>
+              <a:t>Enviar trabajo</a:t>
+            </a:r>
+            <a:endParaRPr lang="es-ES" dirty="0"/>
+          </a:p>
+        </p:txBody>
+      </p:sp>
+      <p:pic>
+        <p:nvPicPr>
+          <p:cNvPr id="6" name="Graphic 5" descr="Cursor outline">
+            <a:extLst>
+              <a:ext uri="{FF2B5EF4-FFF2-40B4-BE49-F238E27FC236}">
+                <a16:creationId xmlns:a16="http://schemas.microsoft.com/office/drawing/2014/main" id="{75EB0E25-9745-44CA-E78C-9E9A82237F64}"/>
+              </a:ext>
+            </a:extLst>
+          </p:cNvPr>
+          <p:cNvPicPr>
+            <a:picLocks noChangeAspect="1"/>
+          </p:cNvPicPr>
+          <p:nvPr/>
+        </p:nvPicPr>
+        <p:blipFill>
+          <a:blip r:embed="rId2">
+            <a:extLst>
+              <a:ext uri="{96DAC541-7B7A-43D3-8B79-37D633B846F1}">
+                <asvg:svgBlip xmlns:asvg="http://schemas.microsoft.com/office/drawing/2016/SVG/main" r:embed="rId3"/>
+              </a:ext>
+            </a:extLst>
+          </a:blip>
+          <a:stretch>
+            <a:fillRect/>
+          </a:stretch>
+        </p:blipFill>
+        <p:spPr>
+          <a:xfrm flipH="1">
+            <a:off x="514400" y="2780928"/>
+            <a:ext cx="961256" cy="961256"/>
+          </a:xfrm>
+          <a:prstGeom prst="rect">
+            <a:avLst/>
+          </a:prstGeom>
+        </p:spPr>
+      </p:pic>
+    </p:spTree>
+    <p:extLst>
+      <p:ext uri="{BB962C8B-B14F-4D97-AF65-F5344CB8AC3E}">
+        <p14:creationId xmlns:p14="http://schemas.microsoft.com/office/powerpoint/2010/main" val="4047968166"/>
       </p:ext>
     </p:extLst>
   </p:cSld>
